--- a/e2e/fixtures/templates/chart-template.pptx
+++ b/e2e/fixtures/templates/chart-template.pptx
@@ -188,7 +188,7 @@
           <p:cNvPr id="2" name="TextBox 2">
             <a:extLst>
               <a:ext uri="{FF2B5EF4-FFF2-40B4-BE49-F238E27FC236}">
-                <a16:creationId xmlns:a16="http://schemas.microsoft.com/office/drawing/2014/main" id="{99D347DE-2B87-4A75-9FA1-7EC31D1A65A0}"/>
+                <a16:creationId xmlns:a16="http://schemas.microsoft.com/office/drawing/2014/main" id="{6BACBDEB-D3E5-4D1B-B891-759622C0C5DC}"/>
               </a:ext>
             </a:extLst>
           </p:cNvPr>
@@ -217,7 +217,7 @@
           <p:cNvPr id="3" name="TextBox 3">
             <a:extLst>
               <a:ext uri="{FF2B5EF4-FFF2-40B4-BE49-F238E27FC236}">
-                <a16:creationId xmlns:a16="http://schemas.microsoft.com/office/drawing/2014/main" id="{5828B64F-E202-4AC1-B7E1-F8971439C501}"/>
+                <a16:creationId xmlns:a16="http://schemas.microsoft.com/office/drawing/2014/main" id="{0BC5CF3D-7EEC-4F9F-A895-E5E5CE85D085}"/>
               </a:ext>
             </a:extLst>
           </p:cNvPr>
@@ -246,7 +246,7 @@
           <p:cNvPr id="4" name="Chart 4" descr="aislides-chart">
             <a:extLst>
               <a:ext uri="{FF2B5EF4-FFF2-40B4-BE49-F238E27FC236}">
-                <a16:creationId xmlns:a16="http://schemas.microsoft.com/office/drawing/2014/main" id="{F384F9F1-E948-4020-975F-9188AE91A04A}"/>
+                <a16:creationId xmlns:a16="http://schemas.microsoft.com/office/drawing/2014/main" id="{9DEBF4C5-993A-496A-B9BC-08A7619D0B99}"/>
               </a:ext>
             </a:extLst>
           </p:cNvPr>
@@ -268,7 +268,7 @@
           <p:cNvPr id="5" name="Table 5">
             <a:extLst>
               <a:ext uri="{FF2B5EF4-FFF2-40B4-BE49-F238E27FC236}">
-                <a16:creationId xmlns:a16="http://schemas.microsoft.com/office/drawing/2014/main" id="{88CDD43C-07DA-4FEB-A564-0EBF8A3CDA83}"/>
+                <a16:creationId xmlns:a16="http://schemas.microsoft.com/office/drawing/2014/main" id="{CB2E79B2-7CAA-41F1-969B-50849334BB43}"/>
               </a:ext>
             </a:extLst>
           </p:cNvPr>

--- a/e2e/fixtures/templates/chart-template.pptx
+++ b/e2e/fixtures/templates/chart-template.pptx
@@ -188,7 +188,7 @@
           <p:cNvPr id="2" name="TextBox 2">
             <a:extLst>
               <a:ext uri="{FF2B5EF4-FFF2-40B4-BE49-F238E27FC236}">
-                <a16:creationId xmlns:a16="http://schemas.microsoft.com/office/drawing/2014/main" id="{6BACBDEB-D3E5-4D1B-B891-759622C0C5DC}"/>
+                <a16:creationId xmlns:a16="http://schemas.microsoft.com/office/drawing/2014/main" id="{C9445277-DF58-42C2-ADD9-B79DC7E93E34}"/>
               </a:ext>
             </a:extLst>
           </p:cNvPr>
@@ -217,7 +217,7 @@
           <p:cNvPr id="3" name="TextBox 3">
             <a:extLst>
               <a:ext uri="{FF2B5EF4-FFF2-40B4-BE49-F238E27FC236}">
-                <a16:creationId xmlns:a16="http://schemas.microsoft.com/office/drawing/2014/main" id="{0BC5CF3D-7EEC-4F9F-A895-E5E5CE85D085}"/>
+                <a16:creationId xmlns:a16="http://schemas.microsoft.com/office/drawing/2014/main" id="{773E5EFA-231F-4C55-B44F-18252732BBA9}"/>
               </a:ext>
             </a:extLst>
           </p:cNvPr>
@@ -246,7 +246,7 @@
           <p:cNvPr id="4" name="Chart 4" descr="aislides-chart">
             <a:extLst>
               <a:ext uri="{FF2B5EF4-FFF2-40B4-BE49-F238E27FC236}">
-                <a16:creationId xmlns:a16="http://schemas.microsoft.com/office/drawing/2014/main" id="{9DEBF4C5-993A-496A-B9BC-08A7619D0B99}"/>
+                <a16:creationId xmlns:a16="http://schemas.microsoft.com/office/drawing/2014/main" id="{E5FA791A-C2DD-48C4-90AC-5849EDDCAC7B}"/>
               </a:ext>
             </a:extLst>
           </p:cNvPr>
@@ -268,7 +268,7 @@
           <p:cNvPr id="5" name="Table 5">
             <a:extLst>
               <a:ext uri="{FF2B5EF4-FFF2-40B4-BE49-F238E27FC236}">
-                <a16:creationId xmlns:a16="http://schemas.microsoft.com/office/drawing/2014/main" id="{CB2E79B2-7CAA-41F1-969B-50849334BB43}"/>
+                <a16:creationId xmlns:a16="http://schemas.microsoft.com/office/drawing/2014/main" id="{709715C5-2937-45F2-A490-98AF7A63B220}"/>
               </a:ext>
             </a:extLst>
           </p:cNvPr>
